--- a/public/fun/pack/pptx/birthdaypro/돌잔치프리미엄_12_돌잡이중심_누드모카.pptx
+++ b/public/fun/pack/pptx/birthdaypro/돌잔치프리미엄_12_돌잡이중심_누드모카.pptx
@@ -112,12 +112,12 @@
   <p:extLst>
     <p:ext uri="{521415D9-36F7-43E2-AB2F-B90AF26B5E84}">
       <p14:sectionLst xmlns:p14="http://schemas.microsoft.com/office/powerpoint/2010/main">
-        <p14:section name="시작" id="{32FF6802-168D-46D5-BBDD-55C219C80B93}">
+        <p14:section name="시작" id="{B5B7ACBC-6705-4958-BBC2-81220D4FD63B}">
           <p14:sldIdLst>
             <p14:sldId id="256"/>
           </p14:sldIdLst>
         </p14:section>
-        <p14:section name="본문" id="{B05FF309-4972-42C7-9B9B-0B3C85252553}">
+        <p14:section name="본문" id="{EA89DFB0-0CD3-407D-8257-59EB96D69767}">
           <p14:sldIdLst>
             <p14:sldId id="257"/>
             <p14:sldId id="258"/>
@@ -125,7 +125,7 @@
             <p14:sldId id="260"/>
           </p14:sldIdLst>
         </p14:section>
-        <p14:section name="마무리" id="{86864771-0974-4E55-B974-D865AEB6531E}">
+        <p14:section name="마무리" id="{BBAAF151-BC7B-48C7-9355-A018B5AF3673}">
           <p14:sldIdLst>
             <p14:sldId id="261"/>
           </p14:sldIdLst>
@@ -1389,7 +1389,7 @@
             </a:lvl1pPr>
           </a:lstStyle>
           <a:p>
-            <a:fld id="{CDAA68A7-89AC-4ACB-BA3F-B0461802E26C}" type="slidenum">
+            <a:fld id="{E6113008-802C-4FF1-A26F-2FE3B30CB51E}" type="slidenum">
               <a:rPr lang="en-US"/>
               <a:t>‹#›</a:t>
             </a:fld>
@@ -1924,7 +1924,7 @@
             </a:lvl1pPr>
           </a:lstStyle>
           <a:p>
-            <a:fld id="{4453A1E5-AE9B-4033-8087-005BBC445F8C}" type="slidenum">
+            <a:fld id="{E749AE30-E0B4-4958-B1BF-12F8D485283D}" type="slidenum">
               <a:rPr lang="en-US"/>
               <a:t>‹#›</a:t>
             </a:fld>
@@ -2513,7 +2513,7 @@
             </a:lvl1pPr>
           </a:lstStyle>
           <a:p>
-            <a:fld id="{C0883018-7674-4420-8FEA-27A2D3D06F59}" type="slidenum">
+            <a:fld id="{CAF8AEEE-CB9E-4D7C-BED4-2E4DF8AABAC6}" type="slidenum">
               <a:rPr lang="en-US"/>
               <a:t>‹#›</a:t>
             </a:fld>
@@ -3316,7 +3316,7 @@
           <a:p>
             <a:r>
               <a:rPr lang="ko-KR"/>
-              <a:t>아기 이름 · 0000. 00. 00</a:t>
+              <a:t>아기 이름 · 날짜 입력</a:t>
             </a:r>
           </a:p>
           <a:p>
@@ -3479,7 +3479,7 @@
           <a:bodyPr/>
           <a:lstStyle/>
           <a:p>
-            <a:fld id="{B72F98F6-EF94-4B7A-B4C7-FE1012394B3F}" type="slidenum">
+            <a:fld id="{C37D3EF0-21CC-48B7-82D5-550052066503}" type="slidenum">
               <a:rPr lang="en-US"/>
               <a:t>‹#›</a:t>
             </a:fld>
@@ -4079,7 +4079,7 @@
           <a:bodyPr/>
           <a:lstStyle/>
           <a:p>
-            <a:fld id="{17AFF905-80E8-4152-A408-0F267574ED47}" type="slidenum">
+            <a:fld id="{7F7101CE-B376-4F5D-9413-393C29C5537E}" type="slidenum">
               <a:rPr lang="en-US"/>
               <a:t>‹#›</a:t>
             </a:fld>
@@ -5343,7 +5343,7 @@
           <a:bodyPr/>
           <a:lstStyle/>
           <a:p>
-            <a:fld id="{F98231A2-1BAF-497B-AF86-B937AE066290}" type="slidenum">
+            <a:fld id="{4AB5315C-2E18-424F-900C-FC75C597A574}" type="slidenum">
               <a:rPr lang="en-US"/>
               <a:t>‹#›</a:t>
             </a:fld>
@@ -6122,7 +6122,7 @@
           <a:bodyPr/>
           <a:lstStyle/>
           <a:p>
-            <a:fld id="{4DB175E4-2049-4EF4-B8F9-8E49135090F0}" type="slidenum">
+            <a:fld id="{6F77A627-F08F-4BB0-86B5-B55F86F3A6D7}" type="slidenum">
               <a:rPr lang="en-US"/>
               <a:t>‹#›</a:t>
             </a:fld>
